--- a/data/エリアマップ.pptx
+++ b/data/エリアマップ.pptx
@@ -104,6 +104,11 @@
       </a:defRPr>
     </a:lvl9pPr>
   </p:defaultTextStyle>
+  <p:extLst>
+    <p:ext uri="{EFAFB233-063F-42B5-8137-9DF3F51BA10A}">
+      <p15:sldGuideLst xmlns:p15="http://schemas.microsoft.com/office/powerpoint/2012/main"/>
+    </p:ext>
+  </p:extLst>
 </p:presentation>
 </file>
 
@@ -238,7 +243,7 @@
           <a:p>
             <a:fld id="{FE0C3EA9-52EC-4BAA-A9B0-BE7BC01460DF}" type="datetimeFigureOut">
               <a:rPr kumimoji="1" lang="ja-JP" altLang="en-US" smtClean="0"/>
-              <a:t>2026/6/21</a:t>
+              <a:t>2026/7/9</a:t>
             </a:fld>
             <a:endParaRPr kumimoji="1" lang="ja-JP" altLang="en-US"/>
           </a:p>
@@ -440,7 +445,7 @@
           <a:p>
             <a:fld id="{FE0C3EA9-52EC-4BAA-A9B0-BE7BC01460DF}" type="datetimeFigureOut">
               <a:rPr kumimoji="1" lang="ja-JP" altLang="en-US" smtClean="0"/>
-              <a:t>2026/6/21</a:t>
+              <a:t>2026/7/9</a:t>
             </a:fld>
             <a:endParaRPr kumimoji="1" lang="ja-JP" altLang="en-US"/>
           </a:p>
@@ -652,7 +657,7 @@
           <a:p>
             <a:fld id="{FE0C3EA9-52EC-4BAA-A9B0-BE7BC01460DF}" type="datetimeFigureOut">
               <a:rPr kumimoji="1" lang="ja-JP" altLang="en-US" smtClean="0"/>
-              <a:t>2026/6/21</a:t>
+              <a:t>2026/7/9</a:t>
             </a:fld>
             <a:endParaRPr kumimoji="1" lang="ja-JP" altLang="en-US"/>
           </a:p>
@@ -854,7 +859,7 @@
           <a:p>
             <a:fld id="{FE0C3EA9-52EC-4BAA-A9B0-BE7BC01460DF}" type="datetimeFigureOut">
               <a:rPr kumimoji="1" lang="ja-JP" altLang="en-US" smtClean="0"/>
-              <a:t>2026/6/21</a:t>
+              <a:t>2026/7/9</a:t>
             </a:fld>
             <a:endParaRPr kumimoji="1" lang="ja-JP" altLang="en-US"/>
           </a:p>
@@ -1098,7 +1103,7 @@
           <a:p>
             <a:fld id="{FE0C3EA9-52EC-4BAA-A9B0-BE7BC01460DF}" type="datetimeFigureOut">
               <a:rPr kumimoji="1" lang="ja-JP" altLang="en-US" smtClean="0"/>
-              <a:t>2026/6/21</a:t>
+              <a:t>2026/7/9</a:t>
             </a:fld>
             <a:endParaRPr kumimoji="1" lang="ja-JP" altLang="en-US"/>
           </a:p>
@@ -1394,7 +1399,7 @@
           <a:p>
             <a:fld id="{FE0C3EA9-52EC-4BAA-A9B0-BE7BC01460DF}" type="datetimeFigureOut">
               <a:rPr kumimoji="1" lang="ja-JP" altLang="en-US" smtClean="0"/>
-              <a:t>2026/6/21</a:t>
+              <a:t>2026/7/9</a:t>
             </a:fld>
             <a:endParaRPr kumimoji="1" lang="ja-JP" altLang="en-US"/>
           </a:p>
@@ -1825,7 +1830,7 @@
           <a:p>
             <a:fld id="{FE0C3EA9-52EC-4BAA-A9B0-BE7BC01460DF}" type="datetimeFigureOut">
               <a:rPr kumimoji="1" lang="ja-JP" altLang="en-US" smtClean="0"/>
-              <a:t>2026/6/21</a:t>
+              <a:t>2026/7/9</a:t>
             </a:fld>
             <a:endParaRPr kumimoji="1" lang="ja-JP" altLang="en-US"/>
           </a:p>
@@ -1943,7 +1948,7 @@
           <a:p>
             <a:fld id="{FE0C3EA9-52EC-4BAA-A9B0-BE7BC01460DF}" type="datetimeFigureOut">
               <a:rPr kumimoji="1" lang="ja-JP" altLang="en-US" smtClean="0"/>
-              <a:t>2026/6/21</a:t>
+              <a:t>2026/7/9</a:t>
             </a:fld>
             <a:endParaRPr kumimoji="1" lang="ja-JP" altLang="en-US"/>
           </a:p>
@@ -2038,7 +2043,7 @@
           <a:p>
             <a:fld id="{FE0C3EA9-52EC-4BAA-A9B0-BE7BC01460DF}" type="datetimeFigureOut">
               <a:rPr kumimoji="1" lang="ja-JP" altLang="en-US" smtClean="0"/>
-              <a:t>2026/6/21</a:t>
+              <a:t>2026/7/9</a:t>
             </a:fld>
             <a:endParaRPr kumimoji="1" lang="ja-JP" altLang="en-US"/>
           </a:p>
@@ -2347,7 +2352,7 @@
           <a:p>
             <a:fld id="{FE0C3EA9-52EC-4BAA-A9B0-BE7BC01460DF}" type="datetimeFigureOut">
               <a:rPr kumimoji="1" lang="ja-JP" altLang="en-US" smtClean="0"/>
-              <a:t>2026/6/21</a:t>
+              <a:t>2026/7/9</a:t>
             </a:fld>
             <a:endParaRPr kumimoji="1" lang="ja-JP" altLang="en-US"/>
           </a:p>
@@ -2604,7 +2609,7 @@
           <a:p>
             <a:fld id="{FE0C3EA9-52EC-4BAA-A9B0-BE7BC01460DF}" type="datetimeFigureOut">
               <a:rPr kumimoji="1" lang="ja-JP" altLang="en-US" smtClean="0"/>
-              <a:t>2026/6/21</a:t>
+              <a:t>2026/7/9</a:t>
             </a:fld>
             <a:endParaRPr kumimoji="1" lang="ja-JP" altLang="en-US"/>
           </a:p>
@@ -2849,7 +2854,7 @@
           <a:p>
             <a:fld id="{FE0C3EA9-52EC-4BAA-A9B0-BE7BC01460DF}" type="datetimeFigureOut">
               <a:rPr kumimoji="1" lang="ja-JP" altLang="en-US" smtClean="0"/>
-              <a:t>2026/6/21</a:t>
+              <a:t>2026/7/9</a:t>
             </a:fld>
             <a:endParaRPr kumimoji="1" lang="ja-JP" altLang="en-US"/>
           </a:p>
@@ -3304,7 +3309,7 @@
         </p:nvSpPr>
         <p:spPr>
           <a:xfrm>
-            <a:off x="578446" y="1285447"/>
+            <a:off x="2205169" y="2139224"/>
             <a:ext cx="1124055" cy="369332"/>
           </a:xfrm>
           <a:prstGeom prst="rect">
@@ -3349,7 +3354,7 @@
         </p:nvSpPr>
         <p:spPr>
           <a:xfrm>
-            <a:off x="2211063" y="2160274"/>
+            <a:off x="5651429" y="1537775"/>
             <a:ext cx="1355602" cy="369332"/>
           </a:xfrm>
           <a:prstGeom prst="rect">
@@ -3394,7 +3399,7 @@
         </p:nvSpPr>
         <p:spPr>
           <a:xfrm>
-            <a:off x="5752468" y="1513626"/>
+            <a:off x="624756" y="1168443"/>
             <a:ext cx="1124055" cy="369332"/>
           </a:xfrm>
           <a:prstGeom prst="rect">
